--- a/materials/week8/w8-slides.pptx
+++ b/materials/week8/w8-slides.pptx
@@ -683,7 +683,7 @@
           <a:lstStyle/>
           <a:p>
             <a:r>
-              <a:t>🎬 เดโมขั้นที่ 5 (3 นาที) — ทำสามขั้นนี้ให้ดูจริง · "จำลำดับนี้ให้ขึ้นใจ กัน Git มองเห็นก่อน แล้วค่อยวางคีย์ .gitignore คือรายชื่อไฟล์ที่ Git ห้ามเก็บ ตั้งกันไว้แล้วตั้งแต่สัปดาห์ที่แล้ว" · "รายการไฟล์ที่มันแสดงมาคือหลักฐาน ถ้าชื่อไฟล์ไม่โผล่ แปลว่าคีย์จะไม่ติดไปกับ commit — พิมพ์บอกมันว่า แสดงรายการไฟล์ที่กำลังจะส่งขึ้น GitHub ให้ผมดู" · เตือน: เผลอ push คีย์ = แจ้งผู้สอนเพิกถอนทันที ลบ commit อย่างเดียวไม่พอ</a:t>
+              <a:t>🎬 เดโมขั้นที่ 5 (3 นาที) — วาง prompt นี้ให้ดูจริง · ย้ำว่า ใช้ได้เพราะเป็นคีย์ของหลักสูตรที่ผมตั้งวงเงินไว้ทุกใบ และจะเพิกถอนทั้งหมดเมื่อจบเดือน · "ห้ามเอาคีย์ส่วนตัวของตัวเองมาใช้เด็ดขาด" · บอกชื่อโมเดลออกเสียงช้า ๆ แล้วให้จดไว้ — ถูกที่สุดในกลุ่มที่ตอบไทยได้ดี · เตือน: คีย์หลุด = แจ้งผู้สอนเพิกถอนทันที</a:t>
             </a:r>
           </a:p>
         </p:txBody>
@@ -6918,31 +6918,34 @@
                 <a:ea typeface="Leelawadee UI"/>
                 <a:cs typeface="Leelawadee UI"/>
               </a:rPr>
-              <a:t>เก็บกุญแจให้ถูกที่ — ลำดับห้ามสลับ</a:t>
-            </a:r>
-          </a:p>
-        </p:txBody>
-      </p:sp>
-      <p:sp>
-        <p:nvSpPr>
-          <p:cNvPr id="3" name="Rectangle 2"/>
+              <a:t>💬 วางคีย์ลงใน prompt ได้เลย</a:t>
+            </a:r>
+          </a:p>
+        </p:txBody>
+      </p:sp>
+      <p:sp>
+        <p:nvSpPr>
+          <p:cNvPr id="3" name="Rounded Rectangle 2"/>
           <p:cNvSpPr/>
           <p:nvPr/>
         </p:nvSpPr>
         <p:spPr>
           <a:xfrm>
             <a:off x="822960" y="1472184"/>
-            <a:ext cx="10545775" cy="1298448"/>
-          </a:xfrm>
-          <a:prstGeom prst="rect">
+            <a:ext cx="10545775" cy="1847088"/>
+          </a:xfrm>
+          <a:prstGeom prst="roundRect">
             <a:avLst/>
           </a:prstGeom>
           <a:solidFill>
-            <a:srgbClr val="F2F4F7"/>
+            <a:srgbClr val="FFF7E6"/>
           </a:solidFill>
-          <a:ln>
-            <a:noFill/>
+          <a:ln w="22225">
+            <a:solidFill>
+              <a:srgbClr val="E0A02C"/>
+            </a:solidFill>
           </a:ln>
+          <a:effectLst/>
         </p:spPr>
         <p:style>
           <a:lnRef idx="1">
@@ -6959,55 +6962,246 @@
           </a:fontRef>
         </p:style>
         <p:txBody>
-          <a:bodyPr rtlCol="0" anchor="ctr" wrap="none" lIns="228600" tIns="137160"/>
+          <a:bodyPr rtlCol="0" anchor="ctr"/>
+          <a:lstStyle/>
+          <a:p/>
+        </p:txBody>
+      </p:sp>
+      <p:sp>
+        <p:nvSpPr>
+          <p:cNvPr id="4" name="Rounded Rectangle 3"/>
+          <p:cNvSpPr/>
+          <p:nvPr/>
+        </p:nvSpPr>
+        <p:spPr>
+          <a:xfrm>
+            <a:off x="822960" y="1472184"/>
+            <a:ext cx="100584" cy="1847088"/>
+          </a:xfrm>
+          <a:prstGeom prst="roundRect">
+            <a:avLst/>
+          </a:prstGeom>
+          <a:solidFill>
+            <a:srgbClr val="E0A02C"/>
+          </a:solidFill>
+          <a:ln>
+            <a:noFill/>
+          </a:ln>
+          <a:effectLst/>
+        </p:spPr>
+        <p:style>
+          <a:lnRef idx="1">
+            <a:schemeClr val="accent1"/>
+          </a:lnRef>
+          <a:fillRef idx="3">
+            <a:schemeClr val="accent1"/>
+          </a:fillRef>
+          <a:effectRef idx="2">
+            <a:schemeClr val="accent1"/>
+          </a:effectRef>
+          <a:fontRef idx="minor">
+            <a:schemeClr val="lt1"/>
+          </a:fontRef>
+        </p:style>
+        <p:txBody>
+          <a:bodyPr rtlCol="0" anchor="ctr"/>
+          <a:lstStyle/>
+          <a:p>
+            <a:pPr algn="ctr"/>
+          </a:p>
+        </p:txBody>
+      </p:sp>
+      <p:sp>
+        <p:nvSpPr>
+          <p:cNvPr id="5" name="TextBox 4"/>
+          <p:cNvSpPr txBox="1"/>
+          <p:nvPr/>
+        </p:nvSpPr>
+        <p:spPr>
+          <a:xfrm>
+            <a:off x="1097280" y="1527048"/>
+            <a:ext cx="10088575" cy="310896"/>
+          </a:xfrm>
+          <a:prstGeom prst="rect">
+            <a:avLst/>
+          </a:prstGeom>
+          <a:noFill/>
+        </p:spPr>
+        <p:txBody>
+          <a:bodyPr wrap="square">
+            <a:spAutoFit/>
+          </a:bodyPr>
           <a:lstStyle/>
           <a:p>
             <a:pPr algn="l"/>
             <a:r>
-              <a:rPr sz="1800" b="0">
+              <a:rPr sz="1400" b="1">
+                <a:solidFill>
+                  <a:srgbClr val="A86C0A"/>
+                </a:solidFill>
+                <a:latin typeface="Leelawadee UI"/>
+                <a:ea typeface="Leelawadee UI"/>
+                <a:cs typeface="Leelawadee UI"/>
+              </a:rPr>
+              <a:t>💬 พิมพ์แบบนี้</a:t>
+            </a:r>
+          </a:p>
+        </p:txBody>
+      </p:sp>
+      <p:sp>
+        <p:nvSpPr>
+          <p:cNvPr id="6" name="TextBox 5"/>
+          <p:cNvSpPr txBox="1"/>
+          <p:nvPr/>
+        </p:nvSpPr>
+        <p:spPr>
+          <a:xfrm>
+            <a:off x="1097280" y="1856232"/>
+            <a:ext cx="10088575" cy="1152144"/>
+          </a:xfrm>
+          <a:prstGeom prst="rect">
+            <a:avLst/>
+          </a:prstGeom>
+          <a:noFill/>
+        </p:spPr>
+        <p:txBody>
+          <a:bodyPr wrap="square">
+            <a:spAutoFit/>
+          </a:bodyPr>
+          <a:lstStyle/>
+          <a:p>
+            <a:pPr algn="l">
+              <a:spcAft>
+                <a:spcPts val="0"/>
+              </a:spcAft>
+            </a:pPr>
+            <a:r>
+              <a:rPr sz="2000" b="0">
                 <a:solidFill>
                   <a:srgbClr val="1A1A1A"/>
                 </a:solidFill>
-                <a:latin typeface="Consolas"/>
-                <a:ea typeface="Consolas"/>
-                <a:cs typeface="Consolas"/>
-              </a:rPr>
-              <a:t>1) เพิ่มบรรทัด  js/config.js  ลงใน .gitignore</a:t>
-            </a:r>
-          </a:p>
+                <a:latin typeface="Leelawadee UI"/>
+                <a:ea typeface="Leelawadee UI"/>
+                <a:cs typeface="Leelawadee UI"/>
+              </a:rPr>
+              <a:t>ผมจะใช้ AI ผ่าน OpenRouter ในเว็บนี้</a:t>
+            </a:r>
+          </a:p>
+          <a:p>
+            <a:pPr algn="l">
+              <a:spcAft>
+                <a:spcPts val="0"/>
+              </a:spcAft>
+            </a:pPr>
+            <a:r>
+              <a:rPr sz="2000" b="0">
+                <a:solidFill>
+                  <a:srgbClr val="1A1A1A"/>
+                </a:solidFill>
+                <a:latin typeface="Leelawadee UI"/>
+                <a:ea typeface="Leelawadee UI"/>
+                <a:cs typeface="Leelawadee UI"/>
+              </a:rPr>
+              <a:t>คีย์ของผมคือ sk-or-xxxxxxxx และใช้โมเดล google/gemini-2.5-flash-lite</a:t>
+            </a:r>
+          </a:p>
+          <a:p>
+            <a:pPr algn="l">
+              <a:spcAft>
+                <a:spcPts val="0"/>
+              </a:spcAft>
+            </a:pPr>
+            <a:r>
+              <a:rPr sz="2000" b="0">
+                <a:solidFill>
+                  <a:srgbClr val="1A1A1A"/>
+                </a:solidFill>
+                <a:latin typeface="Leelawadee UI"/>
+                <a:ea typeface="Leelawadee UI"/>
+                <a:cs typeface="Leelawadee UI"/>
+              </a:rPr>
+              <a:t>ช่วยทำหน้าทดสอบที่กดปุ่มแล้วส่งข้อความว่า สวัสดี</a:t>
+            </a:r>
+          </a:p>
+        </p:txBody>
+      </p:sp>
+      <p:sp>
+        <p:nvSpPr>
+          <p:cNvPr id="7" name="TextBox 6"/>
+          <p:cNvSpPr txBox="1"/>
+          <p:nvPr/>
+        </p:nvSpPr>
+        <p:spPr>
+          <a:xfrm>
+            <a:off x="822960" y="3520440"/>
+            <a:ext cx="10545775" cy="560324"/>
+          </a:xfrm>
+          <a:prstGeom prst="rect">
+            <a:avLst/>
+          </a:prstGeom>
+          <a:noFill/>
+        </p:spPr>
+        <p:txBody>
+          <a:bodyPr wrap="square">
+            <a:spAutoFit/>
+          </a:bodyPr>
+          <a:lstStyle/>
           <a:p>
             <a:pPr algn="l"/>
             <a:r>
-              <a:rPr sz="1800" b="0">
+              <a:rPr sz="2600" b="0">
                 <a:solidFill>
                   <a:srgbClr val="1A1A1A"/>
                 </a:solidFill>
-                <a:latin typeface="Consolas"/>
-                <a:ea typeface="Consolas"/>
-                <a:cs typeface="Consolas"/>
-              </a:rPr>
-              <a:t>2) ให้ Claude แสดงรายการไฟล์ที่จะส่งขึ้น ← ต้องไม่เห็นชื่อไฟล์นี้</a:t>
-            </a:r>
-          </a:p>
+                <a:latin typeface="Leelawadee UI"/>
+                <a:ea typeface="Leelawadee UI"/>
+                <a:cs typeface="Leelawadee UI"/>
+              </a:rPr>
+              <a:t>• ไม่ต้องสร้างไฟล์ตั้งค่าแยก</a:t>
+            </a:r>
+          </a:p>
+        </p:txBody>
+      </p:sp>
+      <p:sp>
+        <p:nvSpPr>
+          <p:cNvPr id="8" name="TextBox 7"/>
+          <p:cNvSpPr txBox="1"/>
+          <p:nvPr/>
+        </p:nvSpPr>
+        <p:spPr>
+          <a:xfrm>
+            <a:off x="822960" y="4135628"/>
+            <a:ext cx="10545775" cy="560324"/>
+          </a:xfrm>
+          <a:prstGeom prst="rect">
+            <a:avLst/>
+          </a:prstGeom>
+          <a:noFill/>
+        </p:spPr>
+        <p:txBody>
+          <a:bodyPr wrap="square">
+            <a:spAutoFit/>
+          </a:bodyPr>
+          <a:lstStyle/>
           <a:p>
             <a:pPr algn="l"/>
             <a:r>
-              <a:rPr sz="1800" b="0">
+              <a:rPr sz="2600" b="0">
                 <a:solidFill>
                   <a:srgbClr val="1A1A1A"/>
                 </a:solidFill>
-                <a:latin typeface="Consolas"/>
-                <a:ea typeface="Consolas"/>
-                <a:cs typeface="Consolas"/>
-              </a:rPr>
-              <a:t>3) ค่อยวางคีย์ลงไฟล์  js/config.js</a:t>
-            </a:r>
-          </a:p>
-        </p:txBody>
-      </p:sp>
-      <p:sp>
-        <p:nvSpPr>
-          <p:cNvPr id="4" name="TextBox 3"/>
+                <a:latin typeface="Leelawadee UI"/>
+                <a:ea typeface="Leelawadee UI"/>
+                <a:cs typeface="Leelawadee UI"/>
+              </a:rPr>
+              <a:t>• ⚠️ คีย์จะติดไปกับโค้ดและขึ้น GitHub ด้วย</a:t>
+            </a:r>
+          </a:p>
+        </p:txBody>
+      </p:sp>
+      <p:sp>
+        <p:nvSpPr>
+          <p:cNvPr id="9" name="TextBox 8"/>
           <p:cNvSpPr txBox="1"/>
           <p:nvPr/>
         </p:nvSpPr>
@@ -7251,7 +7445,7 @@
                 <a:ea typeface="Leelawadee UI"/>
                 <a:cs typeface="Leelawadee UI"/>
               </a:rPr>
-              <a:t>• เก็บกุญแจ AI ให้ถูกที่ก่อนแตะโค้ด</a:t>
+              <a:t>• วางคีย์ใน prompt แล้วเรียก AI ให้สำเร็จ 1 ครั้ง</a:t>
             </a:r>
           </a:p>
         </p:txBody>
@@ -10845,7 +11039,7 @@
                 <a:ea typeface="Leelawadee UI"/>
                 <a:cs typeface="Leelawadee UI"/>
               </a:rPr>
-              <a:t>• คีย์อยู่ในไฟล์ที่ Git มองไม่เห็น</a:t>
+              <a:t>• เรียก AI สำเร็จแล้ว 1 ครั้ง ก่อนแตะฟีเจอร์จริง</a:t>
             </a:r>
           </a:p>
         </p:txBody>
@@ -13031,7 +13225,7 @@
                 <a:ea typeface="Leelawadee UI"/>
                 <a:cs typeface="Leelawadee UI"/>
               </a:rPr>
-              <a:t>• เปลี่ยนโมเดล = แก้ชื่อ 1 บรรทัดใน js/config.js</a:t>
+              <a:t>• ตัวหลัก google/gemini-2.5-flash-lite</a:t>
             </a:r>
           </a:p>
         </p:txBody>
@@ -13068,7 +13262,7 @@
                 <a:ea typeface="Leelawadee UI"/>
                 <a:cs typeface="Leelawadee UI"/>
               </a:rPr>
-              <a:t>• ผลต่างจริง: ความเร็ว · ความนิ่งของรูปแบบคำตอบ</a:t>
+              <a:t>• ตัวถูกกว่า meta-llama/llama-3.1-8b-instruct</a:t>
             </a:r>
           </a:p>
         </p:txBody>
@@ -13082,7 +13276,7 @@
         <p:spPr>
           <a:xfrm>
             <a:off x="822960" y="2702560"/>
-            <a:ext cx="10545775" cy="560324"/>
+            <a:ext cx="10545775" cy="1029208"/>
           </a:xfrm>
           <a:prstGeom prst="rect">
             <a:avLst/>
@@ -13105,7 +13299,7 @@
                 <a:ea typeface="Leelawadee UI"/>
                 <a:cs typeface="Leelawadee UI"/>
               </a:rPr>
-              <a:t>• เลือกตัวที่เหมาะ แล้วจดเหตุผลไว้ 1 บรรทัด</a:t>
+              <a:t>• เปลี่ยนโมเดล = บอก Claude 1 บรรทัด ว่าขอเปลี่ยนเป็นตัวไหน</a:t>
             </a:r>
           </a:p>
         </p:txBody>
@@ -13113,6 +13307,43 @@
       <p:sp>
         <p:nvSpPr>
           <p:cNvPr id="6" name="TextBox 5"/>
+          <p:cNvSpPr txBox="1"/>
+          <p:nvPr/>
+        </p:nvSpPr>
+        <p:spPr>
+          <a:xfrm>
+            <a:off x="822960" y="3786632"/>
+            <a:ext cx="10545775" cy="560324"/>
+          </a:xfrm>
+          <a:prstGeom prst="rect">
+            <a:avLst/>
+          </a:prstGeom>
+          <a:noFill/>
+        </p:spPr>
+        <p:txBody>
+          <a:bodyPr wrap="square">
+            <a:spAutoFit/>
+          </a:bodyPr>
+          <a:lstStyle/>
+          <a:p>
+            <a:pPr algn="l"/>
+            <a:r>
+              <a:rPr sz="2600" b="0">
+                <a:solidFill>
+                  <a:srgbClr val="1A1A1A"/>
+                </a:solidFill>
+                <a:latin typeface="Leelawadee UI"/>
+                <a:ea typeface="Leelawadee UI"/>
+                <a:cs typeface="Leelawadee UI"/>
+              </a:rPr>
+              <a:t>• ผลต่างจริง: ความเร็ว · ความนิ่งของคำตอบภาษาไทย</a:t>
+            </a:r>
+          </a:p>
+        </p:txBody>
+      </p:sp>
+      <p:sp>
+        <p:nvSpPr>
+          <p:cNvPr id="7" name="TextBox 6"/>
           <p:cNvSpPr txBox="1"/>
           <p:nvPr/>
         </p:nvSpPr>
@@ -13486,7 +13717,7 @@
         <p:spPr>
           <a:xfrm>
             <a:off x="822960" y="2702560"/>
-            <a:ext cx="10545775" cy="560324"/>
+            <a:ext cx="10545775" cy="1029208"/>
           </a:xfrm>
           <a:prstGeom prst="rect">
             <a:avLst/>
@@ -13509,7 +13740,7 @@
                 <a:ea typeface="Leelawadee UI"/>
                 <a:cs typeface="Leelawadee UI"/>
               </a:rPr>
-              <a:t>• คีย์อยู่ถูกที่ และรู้ว่าทำไมยังไม่ใช่วิธีของระบบจริง</a:t>
+              <a:t>• รู้ว่าคีย์อยู่ในหน้าเว็บ และทำไมระบบจริงทำแบบนี้ไม่ได้</a:t>
             </a:r>
           </a:p>
         </p:txBody>
@@ -13522,7 +13753,7 @@
         </p:nvSpPr>
         <p:spPr>
           <a:xfrm>
-            <a:off x="822960" y="3317748"/>
+            <a:off x="822960" y="3786632"/>
             <a:ext cx="10545775" cy="560324"/>
           </a:xfrm>
           <a:prstGeom prst="rect">
